--- a/Ojaswi/AIML/ppt.pptx
+++ b/Ojaswi/AIML/ppt.pptx
@@ -127,7 +127,7 @@
           <a:p>
             <a:fld id="{2A40BC31-5B7A-4565-AD04-2E7F9BF83ABB}" type="datetimeFigureOut">
               <a:rPr lang="en-IN" smtClean="0"/>
-              <a:t>01-12-2025</a:t>
+              <a:t>05-12-2025</a:t>
             </a:fld>
             <a:endParaRPr lang="en-IN"/>
           </a:p>
@@ -630,7 +630,7 @@
           <a:p>
             <a:fld id="{1D8BD707-D9CF-40AE-B4C6-C98DA3205C09}" type="datetimeFigureOut">
               <a:rPr lang="en-US"/>
-              <a:t>12/1/2025</a:t>
+              <a:t>12/5/2025</a:t>
             </a:fld>
             <a:endParaRPr lang="en-US"/>
           </a:p>
@@ -1495,7 +1495,7 @@
           <a:p>
             <a:fld id="{1D8BD707-D9CF-40AE-B4C6-C98DA3205C09}" type="datetimeFigureOut">
               <a:rPr lang="en-US"/>
-              <a:t>12/1/2025</a:t>
+              <a:t>12/5/2025</a:t>
             </a:fld>
             <a:endParaRPr lang="en-US"/>
           </a:p>
@@ -1709,7 +1709,7 @@
           <a:p>
             <a:fld id="{1D8BD707-D9CF-40AE-B4C6-C98DA3205C09}" type="datetimeFigureOut">
               <a:rPr lang="en-US"/>
-              <a:t>12/1/2025</a:t>
+              <a:t>12/5/2025</a:t>
             </a:fld>
             <a:endParaRPr lang="en-US"/>
           </a:p>
@@ -1857,7 +1857,7 @@
           <a:p>
             <a:fld id="{1D8BD707-D9CF-40AE-B4C6-C98DA3205C09}" type="datetimeFigureOut">
               <a:rPr lang="en-US"/>
-              <a:t>12/1/2025</a:t>
+              <a:t>12/5/2025</a:t>
             </a:fld>
             <a:endParaRPr lang="en-US"/>
           </a:p>
@@ -1976,7 +1976,7 @@
           <a:p>
             <a:fld id="{1D8BD707-D9CF-40AE-B4C6-C98DA3205C09}" type="datetimeFigureOut">
               <a:rPr lang="en-US"/>
-              <a:t>12/1/2025</a:t>
+              <a:t>12/5/2025</a:t>
             </a:fld>
             <a:endParaRPr lang="en-US"/>
           </a:p>
@@ -2251,7 +2251,7 @@
           <a:p>
             <a:fld id="{1D8BD707-D9CF-40AE-B4C6-C98DA3205C09}" type="datetimeFigureOut">
               <a:rPr lang="en-US"/>
-              <a:t>12/1/2025</a:t>
+              <a:t>12/5/2025</a:t>
             </a:fld>
             <a:endParaRPr lang="en-US"/>
           </a:p>
@@ -7410,7 +7410,7 @@
         <p:spPr>
           <a:xfrm>
             <a:off x="3407206" y="4194372"/>
-            <a:ext cx="11572240" cy="4761865"/>
+            <a:ext cx="11572240" cy="4534575"/>
           </a:xfrm>
           <a:prstGeom prst="rect">
             <a:avLst/>
@@ -7422,728 +7422,67 @@
           </a:bodyPr>
           <a:lstStyle/>
           <a:p>
-            <a:pPr marL="12065" marR="5080" algn="ctr">
-              <a:lnSpc>
-                <a:spcPct val="116500"/>
-              </a:lnSpc>
+            <a:pPr>
               <a:spcBef>
-                <a:spcPts val="100"/>
+                <a:spcPts val="1910"/>
               </a:spcBef>
             </a:pPr>
             <a:r>
-              <a:rPr sz="2950" b="1" spc="95" dirty="0">
-                <a:solidFill>
-                  <a:srgbClr val="FFFFFF"/>
-                </a:solidFill>
-                <a:latin typeface="Tahoma"/>
-                <a:cs typeface="Tahoma"/>
-              </a:rPr>
-              <a:t>THE</a:t>
-            </a:r>
-            <a:r>
-              <a:rPr sz="2950" b="1" spc="-10" dirty="0">
-                <a:solidFill>
-                  <a:srgbClr val="FFFFFF"/>
-                </a:solidFill>
-                <a:latin typeface="Tahoma"/>
-                <a:cs typeface="Tahoma"/>
-              </a:rPr>
-              <a:t> </a:t>
-            </a:r>
-            <a:r>
-              <a:rPr sz="2950" b="1" spc="95" dirty="0">
-                <a:solidFill>
-                  <a:srgbClr val="FFFFFF"/>
-                </a:solidFill>
-                <a:latin typeface="Tahoma"/>
-                <a:cs typeface="Tahoma"/>
-              </a:rPr>
-              <a:t>SAFETYEYE</a:t>
-            </a:r>
-            <a:r>
-              <a:rPr sz="2950" b="1" spc="-5" dirty="0">
-                <a:solidFill>
-                  <a:srgbClr val="FFFFFF"/>
-                </a:solidFill>
-                <a:latin typeface="Tahoma"/>
-                <a:cs typeface="Tahoma"/>
-              </a:rPr>
-              <a:t> </a:t>
-            </a:r>
-            <a:r>
-              <a:rPr sz="2950" b="1" spc="114" dirty="0">
-                <a:solidFill>
-                  <a:srgbClr val="FFFFFF"/>
-                </a:solidFill>
-                <a:latin typeface="Tahoma"/>
-                <a:cs typeface="Tahoma"/>
-              </a:rPr>
-              <a:t>PROJECT</a:t>
-            </a:r>
-            <a:r>
-              <a:rPr sz="2950" b="1" spc="-5" dirty="0">
-                <a:solidFill>
-                  <a:srgbClr val="FFFFFF"/>
-                </a:solidFill>
-                <a:latin typeface="Tahoma"/>
-                <a:cs typeface="Tahoma"/>
-              </a:rPr>
-              <a:t> </a:t>
-            </a:r>
-            <a:r>
-              <a:rPr sz="2950" b="1" spc="80" dirty="0">
-                <a:solidFill>
-                  <a:srgbClr val="FFFFFF"/>
-                </a:solidFill>
-                <a:latin typeface="Tahoma"/>
-                <a:cs typeface="Tahoma"/>
-              </a:rPr>
-              <a:t>SUCCESSFULLY</a:t>
-            </a:r>
-            <a:r>
-              <a:rPr sz="2950" b="1" spc="-5" dirty="0">
-                <a:solidFill>
-                  <a:srgbClr val="FFFFFF"/>
-                </a:solidFill>
-                <a:latin typeface="Tahoma"/>
-                <a:cs typeface="Tahoma"/>
-              </a:rPr>
-              <a:t> </a:t>
-            </a:r>
-            <a:r>
-              <a:rPr sz="2950" b="1" spc="95" dirty="0">
-                <a:solidFill>
-                  <a:srgbClr val="FFFFFF"/>
-                </a:solidFill>
-                <a:latin typeface="Tahoma"/>
-                <a:cs typeface="Tahoma"/>
-              </a:rPr>
-              <a:t>AUTOMATES </a:t>
-            </a:r>
-            <a:r>
-              <a:rPr sz="2950" b="1" spc="175" dirty="0">
-                <a:solidFill>
-                  <a:srgbClr val="FFFFFF"/>
-                </a:solidFill>
-                <a:latin typeface="Tahoma"/>
-                <a:cs typeface="Tahoma"/>
-              </a:rPr>
-              <a:t>PPE</a:t>
-            </a:r>
-            <a:r>
-              <a:rPr sz="2950" b="1" spc="-60" dirty="0">
-                <a:solidFill>
-                  <a:srgbClr val="FFFFFF"/>
-                </a:solidFill>
-                <a:latin typeface="Tahoma"/>
-                <a:cs typeface="Tahoma"/>
-              </a:rPr>
-              <a:t> </a:t>
-            </a:r>
-            <a:r>
-              <a:rPr sz="2950" b="1" dirty="0">
-                <a:solidFill>
-                  <a:srgbClr val="FFFFFF"/>
-                </a:solidFill>
-                <a:latin typeface="Tahoma"/>
-                <a:cs typeface="Tahoma"/>
-              </a:rPr>
-              <a:t>MONITORING</a:t>
-            </a:r>
-            <a:r>
-              <a:rPr sz="2950" b="1" spc="-60" dirty="0">
-                <a:solidFill>
-                  <a:srgbClr val="FFFFFF"/>
-                </a:solidFill>
-                <a:latin typeface="Tahoma"/>
-                <a:cs typeface="Tahoma"/>
-              </a:rPr>
-              <a:t> </a:t>
-            </a:r>
-            <a:r>
-              <a:rPr sz="2950" b="1" dirty="0">
-                <a:solidFill>
-                  <a:srgbClr val="FFFFFF"/>
-                </a:solidFill>
-                <a:latin typeface="Tahoma"/>
-                <a:cs typeface="Tahoma"/>
-              </a:rPr>
-              <a:t>USING</a:t>
-            </a:r>
-            <a:r>
-              <a:rPr sz="2950" b="1" spc="-55" dirty="0">
-                <a:solidFill>
-                  <a:srgbClr val="FFFFFF"/>
-                </a:solidFill>
-                <a:latin typeface="Tahoma"/>
-                <a:cs typeface="Tahoma"/>
-              </a:rPr>
-              <a:t> </a:t>
-            </a:r>
-            <a:r>
-              <a:rPr sz="2950" b="1" spc="160" dirty="0">
-                <a:solidFill>
-                  <a:srgbClr val="FFFFFF"/>
-                </a:solidFill>
-                <a:latin typeface="Tahoma"/>
-                <a:cs typeface="Tahoma"/>
-              </a:rPr>
-              <a:t>ADVANCED</a:t>
-            </a:r>
-            <a:r>
-              <a:rPr sz="2950" b="1" spc="-60" dirty="0">
-                <a:solidFill>
-                  <a:srgbClr val="FFFFFF"/>
-                </a:solidFill>
-                <a:latin typeface="Tahoma"/>
-                <a:cs typeface="Tahoma"/>
-              </a:rPr>
-              <a:t> </a:t>
-            </a:r>
-            <a:r>
-              <a:rPr sz="2950" b="1" spc="120" dirty="0">
-                <a:solidFill>
-                  <a:srgbClr val="FFFFFF"/>
-                </a:solidFill>
-                <a:latin typeface="Tahoma"/>
-                <a:cs typeface="Tahoma"/>
-              </a:rPr>
-              <a:t>COMPUTER</a:t>
-            </a:r>
-            <a:r>
-              <a:rPr sz="2950" b="1" spc="-60" dirty="0">
-                <a:solidFill>
-                  <a:srgbClr val="FFFFFF"/>
-                </a:solidFill>
-                <a:latin typeface="Tahoma"/>
-                <a:cs typeface="Tahoma"/>
-              </a:rPr>
-              <a:t> </a:t>
-            </a:r>
-            <a:r>
-              <a:rPr sz="2950" b="1" spc="-10" dirty="0">
-                <a:solidFill>
-                  <a:srgbClr val="FFFFFF"/>
-                </a:solidFill>
-                <a:latin typeface="Tahoma"/>
-                <a:cs typeface="Tahoma"/>
-              </a:rPr>
-              <a:t>VISION </a:t>
-            </a:r>
-            <a:r>
-              <a:rPr sz="2950" b="1" spc="45" dirty="0">
-                <a:solidFill>
-                  <a:srgbClr val="FFFFFF"/>
-                </a:solidFill>
-                <a:latin typeface="Tahoma"/>
-                <a:cs typeface="Tahoma"/>
-              </a:rPr>
-              <a:t>TECHNIQUES.</a:t>
-            </a:r>
-            <a:r>
-              <a:rPr sz="2950" b="1" spc="-10" dirty="0">
-                <a:solidFill>
-                  <a:srgbClr val="FFFFFF"/>
-                </a:solidFill>
-                <a:latin typeface="Tahoma"/>
-                <a:cs typeface="Tahoma"/>
-              </a:rPr>
-              <a:t> </a:t>
-            </a:r>
-            <a:r>
-              <a:rPr sz="2950" b="1" spc="-240" dirty="0">
-                <a:solidFill>
-                  <a:srgbClr val="FFFFFF"/>
-                </a:solidFill>
-                <a:latin typeface="Tahoma"/>
-                <a:cs typeface="Tahoma"/>
-              </a:rPr>
-              <a:t>IT</a:t>
-            </a:r>
-            <a:r>
-              <a:rPr sz="2950" b="1" spc="-5" dirty="0">
-                <a:solidFill>
-                  <a:srgbClr val="FFFFFF"/>
-                </a:solidFill>
-                <a:latin typeface="Tahoma"/>
-                <a:cs typeface="Tahoma"/>
-              </a:rPr>
-              <a:t> </a:t>
-            </a:r>
-            <a:r>
-              <a:rPr sz="2950" b="1" spc="125" dirty="0">
-                <a:solidFill>
-                  <a:srgbClr val="FFFFFF"/>
-                </a:solidFill>
-                <a:latin typeface="Tahoma"/>
-                <a:cs typeface="Tahoma"/>
-              </a:rPr>
-              <a:t>REDUCES</a:t>
-            </a:r>
-            <a:r>
-              <a:rPr sz="2950" b="1" spc="-5" dirty="0">
-                <a:solidFill>
-                  <a:srgbClr val="FFFFFF"/>
-                </a:solidFill>
-                <a:latin typeface="Tahoma"/>
-                <a:cs typeface="Tahoma"/>
-              </a:rPr>
-              <a:t> </a:t>
-            </a:r>
-            <a:r>
-              <a:rPr sz="2950" b="1" spc="95" dirty="0">
-                <a:solidFill>
-                  <a:srgbClr val="FFFFFF"/>
-                </a:solidFill>
-                <a:latin typeface="Tahoma"/>
-                <a:cs typeface="Tahoma"/>
-              </a:rPr>
-              <a:t>THE</a:t>
-            </a:r>
-            <a:r>
-              <a:rPr sz="2950" b="1" spc="-5" dirty="0">
-                <a:solidFill>
-                  <a:srgbClr val="FFFFFF"/>
-                </a:solidFill>
-                <a:latin typeface="Tahoma"/>
-                <a:cs typeface="Tahoma"/>
-              </a:rPr>
-              <a:t> </a:t>
-            </a:r>
-            <a:r>
-              <a:rPr sz="2950" b="1" spc="140" dirty="0">
-                <a:solidFill>
-                  <a:srgbClr val="FFFFFF"/>
-                </a:solidFill>
-                <a:latin typeface="Tahoma"/>
-                <a:cs typeface="Tahoma"/>
-              </a:rPr>
-              <a:t>DEPENDENCY</a:t>
-            </a:r>
-            <a:r>
-              <a:rPr sz="2950" b="1" spc="-5" dirty="0">
-                <a:solidFill>
-                  <a:srgbClr val="FFFFFF"/>
-                </a:solidFill>
-                <a:latin typeface="Tahoma"/>
-                <a:cs typeface="Tahoma"/>
-              </a:rPr>
-              <a:t> </a:t>
-            </a:r>
-            <a:r>
-              <a:rPr sz="2950" b="1" spc="150" dirty="0">
-                <a:solidFill>
-                  <a:srgbClr val="FFFFFF"/>
-                </a:solidFill>
-                <a:latin typeface="Tahoma"/>
-                <a:cs typeface="Tahoma"/>
-              </a:rPr>
-              <a:t>ON</a:t>
-            </a:r>
-            <a:r>
-              <a:rPr sz="2950" b="1" spc="-5" dirty="0">
-                <a:solidFill>
-                  <a:srgbClr val="FFFFFF"/>
-                </a:solidFill>
-                <a:latin typeface="Tahoma"/>
-                <a:cs typeface="Tahoma"/>
-              </a:rPr>
-              <a:t> </a:t>
-            </a:r>
-            <a:r>
-              <a:rPr sz="2950" b="1" spc="135" dirty="0">
-                <a:solidFill>
-                  <a:srgbClr val="FFFFFF"/>
-                </a:solidFill>
-                <a:latin typeface="Tahoma"/>
-                <a:cs typeface="Tahoma"/>
-              </a:rPr>
-              <a:t>MANUAL </a:t>
-            </a:r>
-            <a:r>
-              <a:rPr sz="2950" b="1" dirty="0">
-                <a:solidFill>
-                  <a:srgbClr val="FFFFFF"/>
-                </a:solidFill>
-                <a:latin typeface="Tahoma"/>
-                <a:cs typeface="Tahoma"/>
-              </a:rPr>
-              <a:t>SUPERVISION,</a:t>
-            </a:r>
-            <a:r>
-              <a:rPr sz="2950" b="1" spc="-15" dirty="0">
-                <a:solidFill>
-                  <a:srgbClr val="FFFFFF"/>
-                </a:solidFill>
-                <a:latin typeface="Tahoma"/>
-                <a:cs typeface="Tahoma"/>
-              </a:rPr>
-              <a:t> </a:t>
-            </a:r>
-            <a:r>
-              <a:rPr sz="2950" b="1" spc="45" dirty="0">
-                <a:solidFill>
-                  <a:srgbClr val="FFFFFF"/>
-                </a:solidFill>
-                <a:latin typeface="Tahoma"/>
-                <a:cs typeface="Tahoma"/>
-              </a:rPr>
-              <a:t>IMPROVES</a:t>
-            </a:r>
-            <a:r>
-              <a:rPr sz="2950" b="1" spc="-10" dirty="0">
-                <a:solidFill>
-                  <a:srgbClr val="FFFFFF"/>
-                </a:solidFill>
-                <a:latin typeface="Tahoma"/>
-                <a:cs typeface="Tahoma"/>
-              </a:rPr>
-              <a:t> </a:t>
-            </a:r>
-            <a:r>
-              <a:rPr sz="2950" b="1" spc="95" dirty="0">
-                <a:solidFill>
-                  <a:srgbClr val="FFFFFF"/>
-                </a:solidFill>
-                <a:latin typeface="Tahoma"/>
-                <a:cs typeface="Tahoma"/>
-              </a:rPr>
-              <a:t>SAFETY</a:t>
-            </a:r>
-            <a:r>
-              <a:rPr sz="2950" b="1" spc="-10" dirty="0">
-                <a:solidFill>
-                  <a:srgbClr val="FFFFFF"/>
-                </a:solidFill>
-                <a:latin typeface="Tahoma"/>
-                <a:cs typeface="Tahoma"/>
-              </a:rPr>
-              <a:t> </a:t>
-            </a:r>
-            <a:r>
-              <a:rPr sz="2950" b="1" spc="75" dirty="0">
-                <a:solidFill>
-                  <a:srgbClr val="FFFFFF"/>
-                </a:solidFill>
-                <a:latin typeface="Tahoma"/>
-                <a:cs typeface="Tahoma"/>
-              </a:rPr>
-              <a:t>COMPLIANCE,</a:t>
-            </a:r>
-            <a:r>
-              <a:rPr sz="2950" b="1" spc="-10" dirty="0">
-                <a:solidFill>
-                  <a:srgbClr val="FFFFFF"/>
-                </a:solidFill>
-                <a:latin typeface="Tahoma"/>
-                <a:cs typeface="Tahoma"/>
-              </a:rPr>
-              <a:t> </a:t>
-            </a:r>
-            <a:r>
-              <a:rPr sz="2950" b="1" spc="140" dirty="0">
-                <a:solidFill>
-                  <a:srgbClr val="FFFFFF"/>
-                </a:solidFill>
-                <a:latin typeface="Tahoma"/>
-                <a:cs typeface="Tahoma"/>
-              </a:rPr>
-              <a:t>AND </a:t>
-            </a:r>
-            <a:r>
-              <a:rPr sz="2950" b="1" spc="50" dirty="0">
-                <a:solidFill>
-                  <a:srgbClr val="FFFFFF"/>
-                </a:solidFill>
-                <a:latin typeface="Tahoma"/>
-                <a:cs typeface="Tahoma"/>
-              </a:rPr>
-              <a:t>PROVIDES</a:t>
-            </a:r>
-            <a:r>
-              <a:rPr sz="2950" b="1" spc="-40" dirty="0">
-                <a:solidFill>
-                  <a:srgbClr val="FFFFFF"/>
-                </a:solidFill>
-                <a:latin typeface="Tahoma"/>
-                <a:cs typeface="Tahoma"/>
-              </a:rPr>
-              <a:t> </a:t>
-            </a:r>
-            <a:r>
-              <a:rPr sz="2950" b="1" spc="50" dirty="0">
-                <a:solidFill>
-                  <a:srgbClr val="FFFFFF"/>
-                </a:solidFill>
-                <a:latin typeface="Tahoma"/>
-                <a:cs typeface="Tahoma"/>
-              </a:rPr>
-              <a:t>REAL-</a:t>
-            </a:r>
-            <a:r>
-              <a:rPr sz="2950" b="1" dirty="0">
-                <a:solidFill>
-                  <a:srgbClr val="FFFFFF"/>
-                </a:solidFill>
-                <a:latin typeface="Tahoma"/>
-                <a:cs typeface="Tahoma"/>
-              </a:rPr>
-              <a:t>TIME</a:t>
-            </a:r>
-            <a:r>
-              <a:rPr sz="2950" b="1" spc="-40" dirty="0">
-                <a:solidFill>
-                  <a:srgbClr val="FFFFFF"/>
-                </a:solidFill>
-                <a:latin typeface="Tahoma"/>
-                <a:cs typeface="Tahoma"/>
-              </a:rPr>
-              <a:t> </a:t>
-            </a:r>
-            <a:r>
-              <a:rPr sz="2950" b="1" spc="-65" dirty="0">
-                <a:solidFill>
-                  <a:srgbClr val="FFFFFF"/>
-                </a:solidFill>
-                <a:latin typeface="Tahoma"/>
-                <a:cs typeface="Tahoma"/>
-              </a:rPr>
-              <a:t>INSIGHTS.</a:t>
-            </a:r>
-            <a:r>
-              <a:rPr sz="2950" b="1" spc="-35" dirty="0">
-                <a:solidFill>
-                  <a:srgbClr val="FFFFFF"/>
-                </a:solidFill>
-                <a:latin typeface="Tahoma"/>
-                <a:cs typeface="Tahoma"/>
-              </a:rPr>
-              <a:t> </a:t>
-            </a:r>
-            <a:r>
-              <a:rPr sz="2950" b="1" spc="-50" dirty="0">
-                <a:solidFill>
-                  <a:srgbClr val="FFFFFF"/>
-                </a:solidFill>
-                <a:latin typeface="Tahoma"/>
-                <a:cs typeface="Tahoma"/>
-              </a:rPr>
-              <a:t>THIS</a:t>
-            </a:r>
-            <a:r>
-              <a:rPr sz="2950" b="1" spc="-40" dirty="0">
-                <a:solidFill>
-                  <a:srgbClr val="FFFFFF"/>
-                </a:solidFill>
-                <a:latin typeface="Tahoma"/>
-                <a:cs typeface="Tahoma"/>
-              </a:rPr>
-              <a:t> </a:t>
-            </a:r>
-            <a:r>
-              <a:rPr sz="2950" b="1" dirty="0">
-                <a:solidFill>
-                  <a:srgbClr val="FFFFFF"/>
-                </a:solidFill>
-                <a:latin typeface="Tahoma"/>
-                <a:cs typeface="Tahoma"/>
-              </a:rPr>
-              <a:t>SOLUTION</a:t>
-            </a:r>
-            <a:r>
-              <a:rPr sz="2950" b="1" spc="-40" dirty="0">
-                <a:solidFill>
-                  <a:srgbClr val="FFFFFF"/>
-                </a:solidFill>
-                <a:latin typeface="Tahoma"/>
-                <a:cs typeface="Tahoma"/>
-              </a:rPr>
-              <a:t> </a:t>
-            </a:r>
-            <a:r>
-              <a:rPr sz="2950" b="1" spc="150" dirty="0">
-                <a:solidFill>
-                  <a:srgbClr val="FFFFFF"/>
-                </a:solidFill>
-                <a:latin typeface="Tahoma"/>
-                <a:cs typeface="Tahoma"/>
-              </a:rPr>
-              <a:t>CAN</a:t>
-            </a:r>
-            <a:r>
-              <a:rPr sz="2950" b="1" spc="-35" dirty="0">
-                <a:solidFill>
-                  <a:srgbClr val="FFFFFF"/>
-                </a:solidFill>
-                <a:latin typeface="Tahoma"/>
-                <a:cs typeface="Tahoma"/>
-              </a:rPr>
-              <a:t> </a:t>
-            </a:r>
-            <a:r>
-              <a:rPr sz="2950" b="1" spc="170" dirty="0">
-                <a:solidFill>
-                  <a:srgbClr val="FFFFFF"/>
-                </a:solidFill>
-                <a:latin typeface="Tahoma"/>
-                <a:cs typeface="Tahoma"/>
-              </a:rPr>
-              <a:t>BE </a:t>
-            </a:r>
-            <a:r>
-              <a:rPr sz="2950" b="1" spc="130" dirty="0">
-                <a:solidFill>
-                  <a:srgbClr val="FFFFFF"/>
-                </a:solidFill>
-                <a:latin typeface="Tahoma"/>
-                <a:cs typeface="Tahoma"/>
-              </a:rPr>
-              <a:t>DEPLOYED</a:t>
-            </a:r>
-            <a:r>
-              <a:rPr sz="2950" b="1" spc="50" dirty="0">
-                <a:solidFill>
-                  <a:srgbClr val="FFFFFF"/>
-                </a:solidFill>
-                <a:latin typeface="Tahoma"/>
-                <a:cs typeface="Tahoma"/>
-              </a:rPr>
-              <a:t> </a:t>
-            </a:r>
-            <a:r>
-              <a:rPr sz="2950" b="1" spc="-180" dirty="0">
-                <a:solidFill>
-                  <a:srgbClr val="FFFFFF"/>
-                </a:solidFill>
-                <a:latin typeface="Tahoma"/>
-                <a:cs typeface="Tahoma"/>
-              </a:rPr>
-              <a:t>IN</a:t>
-            </a:r>
-            <a:r>
-              <a:rPr sz="2950" b="1" spc="55" dirty="0">
-                <a:solidFill>
-                  <a:srgbClr val="FFFFFF"/>
-                </a:solidFill>
-                <a:latin typeface="Tahoma"/>
-                <a:cs typeface="Tahoma"/>
-              </a:rPr>
-              <a:t> </a:t>
-            </a:r>
-            <a:r>
-              <a:rPr sz="2950" b="1" dirty="0">
-                <a:solidFill>
-                  <a:srgbClr val="FFFFFF"/>
-                </a:solidFill>
-                <a:latin typeface="Tahoma"/>
-                <a:cs typeface="Tahoma"/>
-              </a:rPr>
-              <a:t>FACTORIES,</a:t>
-            </a:r>
-            <a:r>
-              <a:rPr sz="2950" b="1" spc="55" dirty="0">
-                <a:solidFill>
-                  <a:srgbClr val="FFFFFF"/>
-                </a:solidFill>
-                <a:latin typeface="Tahoma"/>
-                <a:cs typeface="Tahoma"/>
-              </a:rPr>
-              <a:t> </a:t>
-            </a:r>
-            <a:r>
-              <a:rPr sz="2950" b="1" spc="50" dirty="0">
-                <a:solidFill>
-                  <a:srgbClr val="FFFFFF"/>
-                </a:solidFill>
-                <a:latin typeface="Tahoma"/>
-                <a:cs typeface="Tahoma"/>
-              </a:rPr>
-              <a:t>CONSTRUCTION </a:t>
-            </a:r>
-            <a:r>
-              <a:rPr sz="2950" b="1" spc="-10" dirty="0">
-                <a:solidFill>
-                  <a:srgbClr val="FFFFFF"/>
-                </a:solidFill>
-                <a:latin typeface="Tahoma"/>
-                <a:cs typeface="Tahoma"/>
-              </a:rPr>
-              <a:t>SITES, </a:t>
-            </a:r>
-            <a:r>
-              <a:rPr sz="2950" b="1" spc="110" dirty="0">
-                <a:solidFill>
-                  <a:srgbClr val="FFFFFF"/>
-                </a:solidFill>
-                <a:latin typeface="Tahoma"/>
-                <a:cs typeface="Tahoma"/>
-              </a:rPr>
-              <a:t>WAREHOUSES,</a:t>
-            </a:r>
-            <a:r>
-              <a:rPr sz="2950" b="1" spc="-65" dirty="0">
-                <a:solidFill>
-                  <a:srgbClr val="FFFFFF"/>
-                </a:solidFill>
-                <a:latin typeface="Tahoma"/>
-                <a:cs typeface="Tahoma"/>
-              </a:rPr>
-              <a:t> </a:t>
-            </a:r>
-            <a:r>
-              <a:rPr sz="2950" b="1" spc="165" dirty="0">
-                <a:solidFill>
-                  <a:srgbClr val="FFFFFF"/>
-                </a:solidFill>
-                <a:latin typeface="Tahoma"/>
-                <a:cs typeface="Tahoma"/>
-              </a:rPr>
-              <a:t>AND</a:t>
-            </a:r>
-            <a:r>
-              <a:rPr sz="2950" b="1" spc="-60" dirty="0">
-                <a:solidFill>
-                  <a:srgbClr val="FFFFFF"/>
-                </a:solidFill>
-                <a:latin typeface="Tahoma"/>
-                <a:cs typeface="Tahoma"/>
-              </a:rPr>
-              <a:t> </a:t>
-            </a:r>
-            <a:r>
-              <a:rPr sz="2950" b="1" dirty="0">
-                <a:solidFill>
-                  <a:srgbClr val="FFFFFF"/>
-                </a:solidFill>
-                <a:latin typeface="Tahoma"/>
-                <a:cs typeface="Tahoma"/>
-              </a:rPr>
-              <a:t>INDUSTRIAL</a:t>
-            </a:r>
-            <a:r>
-              <a:rPr sz="2950" b="1" spc="-65" dirty="0">
-                <a:solidFill>
-                  <a:srgbClr val="FFFFFF"/>
-                </a:solidFill>
-                <a:latin typeface="Tahoma"/>
-                <a:cs typeface="Tahoma"/>
-              </a:rPr>
-              <a:t> </a:t>
-            </a:r>
-            <a:r>
-              <a:rPr sz="2950" b="1" spc="65" dirty="0">
-                <a:solidFill>
-                  <a:srgbClr val="FFFFFF"/>
-                </a:solidFill>
-                <a:latin typeface="Tahoma"/>
-                <a:cs typeface="Tahoma"/>
-              </a:rPr>
-              <a:t>PLANTS.</a:t>
-            </a:r>
-            <a:endParaRPr sz="2950">
-              <a:latin typeface="Tahoma"/>
-              <a:cs typeface="Tahoma"/>
-            </a:endParaRPr>
+              <a:rPr lang="en-US" sz="3200" dirty="0">
+                <a:solidFill>
+                  <a:schemeClr val="bg1"/>
+                </a:solidFill>
+              </a:rPr>
+              <a:t>The </a:t>
+            </a:r>
+            <a:r>
+              <a:rPr lang="en-US" sz="3200" dirty="0" err="1">
+                <a:solidFill>
+                  <a:schemeClr val="bg1"/>
+                </a:solidFill>
+              </a:rPr>
+              <a:t>SafetyEye</a:t>
+            </a:r>
+            <a:r>
+              <a:rPr lang="en-US" sz="3200" dirty="0">
+                <a:solidFill>
+                  <a:schemeClr val="bg1"/>
+                </a:solidFill>
+              </a:rPr>
+              <a:t> project automates PPE monitoring using advanced computer vision, reducing manual effort, improving safety compliance, and delivering real-time insights across factories, construction sites, warehouses, and industrial plants. Future enhancements include IoT </a:t>
+            </a:r>
+            <a:r>
+              <a:rPr lang="en-US" sz="3200" dirty="0" err="1">
+                <a:solidFill>
+                  <a:schemeClr val="bg1"/>
+                </a:solidFill>
+              </a:rPr>
+              <a:t>integration,Multi</a:t>
+            </a:r>
+            <a:r>
+              <a:rPr lang="en-US" sz="3200" dirty="0">
+                <a:solidFill>
+                  <a:schemeClr val="bg1"/>
+                </a:solidFill>
+              </a:rPr>
+              <a:t>-Camera Tracking, Dashboard </a:t>
+            </a:r>
+            <a:r>
+              <a:rPr lang="en-US" sz="3200" dirty="0" err="1">
+                <a:solidFill>
+                  <a:schemeClr val="bg1"/>
+                </a:solidFill>
+              </a:rPr>
+              <a:t>Enhancements,predictive</a:t>
+            </a:r>
+            <a:r>
+              <a:rPr lang="en-US" sz="3200" dirty="0">
+                <a:solidFill>
+                  <a:schemeClr val="bg1"/>
+                </a:solidFill>
+              </a:rPr>
+              <a:t> analytics, and smarter alerting systems to further strengthen workplace safety.</a:t>
+            </a:r>
           </a:p>
           <a:p>
             <a:pPr>
@@ -8154,7 +7493,7 @@
                 <a:spcPts val="1910"/>
               </a:spcBef>
             </a:pPr>
-            <a:endParaRPr sz="2950">
+            <a:endParaRPr sz="2950" dirty="0">
               <a:latin typeface="Tahoma"/>
               <a:cs typeface="Tahoma"/>
             </a:endParaRPr>
@@ -8175,7 +7514,7 @@
               </a:rPr>
               <a:t>-</a:t>
             </a:r>
-            <a:endParaRPr sz="2450">
+            <a:endParaRPr sz="2450" dirty="0">
               <a:latin typeface="Verdana"/>
               <a:cs typeface="Verdana"/>
             </a:endParaRPr>
@@ -17024,13 +16363,13 @@
   <p:clrMapOvr>
     <a:masterClrMapping/>
   </p:clrMapOvr>
-  <mc:AlternateContent xmlns:mc="http://schemas.openxmlformats.org/markup-compatibility/2006">
-    <mc:Choice xmlns:p159="http://schemas.microsoft.com/office/powerpoint/2015/09/main" Requires="p159">
+  <mc:AlternateContent xmlns:mc="http://schemas.openxmlformats.org/markup-compatibility/2006" xmlns:p159="http://schemas.microsoft.com/office/powerpoint/2015/09/main">
+    <mc:Choice Requires="p159">
       <p:transition xmlns:p14="http://schemas.microsoft.com/office/powerpoint/2010/main" spd="slow" p14:dur="2000">
         <p159:morph option="byObject"/>
       </p:transition>
     </mc:Choice>
-    <mc:Fallback>
+    <mc:Fallback xmlns="">
       <p:transition spd="slow">
         <p:fade/>
       </p:transition>
@@ -30019,28 +29358,6 @@
           </a:prstGeom>
         </p:spPr>
       </p:pic>
-      <p:pic>
-        <p:nvPicPr>
-          <p:cNvPr id="13" name="object 13"/>
-          <p:cNvPicPr/>
-          <p:nvPr/>
-        </p:nvPicPr>
-        <p:blipFill>
-          <a:blip r:embed="rId3" cstate="print"/>
-          <a:stretch>
-            <a:fillRect/>
-          </a:stretch>
-        </p:blipFill>
-        <p:spPr>
-          <a:xfrm>
-            <a:off x="1899941" y="4238847"/>
-            <a:ext cx="5676900" cy="3771900"/>
-          </a:xfrm>
-          <a:prstGeom prst="rect">
-            <a:avLst/>
-          </a:prstGeom>
-        </p:spPr>
-      </p:pic>
       <p:sp>
         <p:nvSpPr>
           <p:cNvPr id="14" name="object 14"/>
@@ -30232,7 +29549,7 @@
           <p:nvPr/>
         </p:nvPicPr>
         <p:blipFill>
-          <a:blip r:embed="rId4" cstate="print"/>
+          <a:blip r:embed="rId3" cstate="print"/>
           <a:stretch>
             <a:fillRect/>
           </a:stretch>
@@ -30254,7 +29571,7 @@
           <p:nvPr/>
         </p:nvPicPr>
         <p:blipFill>
-          <a:blip r:embed="rId4" cstate="print"/>
+          <a:blip r:embed="rId3" cstate="print"/>
           <a:stretch>
             <a:fillRect/>
           </a:stretch>
@@ -30276,7 +29593,7 @@
           <p:nvPr/>
         </p:nvPicPr>
         <p:blipFill>
-          <a:blip r:embed="rId4" cstate="print"/>
+          <a:blip r:embed="rId3" cstate="print"/>
           <a:stretch>
             <a:fillRect/>
           </a:stretch>
@@ -30298,7 +29615,7 @@
           <p:nvPr/>
         </p:nvPicPr>
         <p:blipFill>
-          <a:blip r:embed="rId4" cstate="print"/>
+          <a:blip r:embed="rId3" cstate="print"/>
           <a:stretch>
             <a:fillRect/>
           </a:stretch>
@@ -30320,7 +29637,7 @@
           <p:nvPr/>
         </p:nvPicPr>
         <p:blipFill>
-          <a:blip r:embed="rId4" cstate="print"/>
+          <a:blip r:embed="rId3" cstate="print"/>
           <a:stretch>
             <a:fillRect/>
           </a:stretch>
@@ -30342,7 +29659,7 @@
           <p:nvPr/>
         </p:nvPicPr>
         <p:blipFill>
-          <a:blip r:embed="rId4" cstate="print"/>
+          <a:blip r:embed="rId3" cstate="print"/>
           <a:stretch>
             <a:fillRect/>
           </a:stretch>
@@ -30364,7 +29681,7 @@
           <p:nvPr/>
         </p:nvPicPr>
         <p:blipFill>
-          <a:blip r:embed="rId4" cstate="print"/>
+          <a:blip r:embed="rId3" cstate="print"/>
           <a:stretch>
             <a:fillRect/>
           </a:stretch>
@@ -30386,7 +29703,7 @@
           <p:nvPr/>
         </p:nvPicPr>
         <p:blipFill>
-          <a:blip r:embed="rId4" cstate="print"/>
+          <a:blip r:embed="rId3" cstate="print"/>
           <a:stretch>
             <a:fillRect/>
           </a:stretch>
@@ -30408,7 +29725,7 @@
           <p:nvPr/>
         </p:nvPicPr>
         <p:blipFill>
-          <a:blip r:embed="rId4" cstate="print"/>
+          <a:blip r:embed="rId3" cstate="print"/>
           <a:stretch>
             <a:fillRect/>
           </a:stretch>
@@ -30430,7 +29747,7 @@
           <p:nvPr/>
         </p:nvPicPr>
         <p:blipFill>
-          <a:blip r:embed="rId4" cstate="print"/>
+          <a:blip r:embed="rId3" cstate="print"/>
           <a:stretch>
             <a:fillRect/>
           </a:stretch>
@@ -30452,7 +29769,7 @@
           <p:nvPr/>
         </p:nvPicPr>
         <p:blipFill>
-          <a:blip r:embed="rId4" cstate="print"/>
+          <a:blip r:embed="rId3" cstate="print"/>
           <a:stretch>
             <a:fillRect/>
           </a:stretch>
@@ -30474,7 +29791,7 @@
           <p:nvPr/>
         </p:nvPicPr>
         <p:blipFill>
-          <a:blip r:embed="rId4" cstate="print"/>
+          <a:blip r:embed="rId3" cstate="print"/>
           <a:stretch>
             <a:fillRect/>
           </a:stretch>
@@ -30496,7 +29813,7 @@
           <p:nvPr/>
         </p:nvPicPr>
         <p:blipFill>
-          <a:blip r:embed="rId4" cstate="print"/>
+          <a:blip r:embed="rId3" cstate="print"/>
           <a:stretch>
             <a:fillRect/>
           </a:stretch>
@@ -30518,7 +29835,7 @@
           <p:nvPr/>
         </p:nvPicPr>
         <p:blipFill>
-          <a:blip r:embed="rId4" cstate="print"/>
+          <a:blip r:embed="rId3" cstate="print"/>
           <a:stretch>
             <a:fillRect/>
           </a:stretch>
@@ -32208,6 +31525,42 @@
           </p:txBody>
         </p:sp>
       </p:grpSp>
+      <p:pic>
+        <p:nvPicPr>
+          <p:cNvPr id="38" name="Picture 37">
+            <a:extLst>
+              <a:ext uri="{FF2B5EF4-FFF2-40B4-BE49-F238E27FC236}">
+                <a16:creationId xmlns:a16="http://schemas.microsoft.com/office/drawing/2014/main" id="{4949DA09-9FBC-3788-B91C-8BC3AA5FA575}"/>
+              </a:ext>
+            </a:extLst>
+          </p:cNvPr>
+          <p:cNvPicPr>
+            <a:picLocks noChangeAspect="1"/>
+          </p:cNvPicPr>
+          <p:nvPr/>
+        </p:nvPicPr>
+        <p:blipFill>
+          <a:blip r:embed="rId4">
+            <a:extLst>
+              <a:ext uri="{28A0092B-C50C-407E-A947-70E740481C1C}">
+                <a14:useLocalDpi xmlns:a14="http://schemas.microsoft.com/office/drawing/2010/main" val="0"/>
+              </a:ext>
+            </a:extLst>
+          </a:blip>
+          <a:stretch>
+            <a:fillRect/>
+          </a:stretch>
+        </p:blipFill>
+        <p:spPr>
+          <a:xfrm>
+            <a:off x="1457845" y="4312749"/>
+            <a:ext cx="5680374" cy="3802572"/>
+          </a:xfrm>
+          <a:prstGeom prst="rect">
+            <a:avLst/>
+          </a:prstGeom>
+        </p:spPr>
+      </p:pic>
     </p:spTree>
   </p:cSld>
   <p:clrMapOvr>
@@ -32445,7 +31798,7 @@
                                           </p:stCondLst>
                                         </p:cTn>
                                         <p:tgtEl>
-                                          <p:spTgt spid="13"/>
+                                          <p:spTgt spid="34"/>
                                         </p:tgtEl>
                                         <p:attrNameLst>
                                           <p:attrName>style.visibility</p:attrName>
@@ -32459,112 +31812,13 @@
                                       <p:cBhvr>
                                         <p:cTn id="21" dur="1000"/>
                                         <p:tgtEl>
-                                          <p:spTgt spid="13"/>
+                                          <p:spTgt spid="34"/>
                                         </p:tgtEl>
                                       </p:cBhvr>
                                     </p:animEffect>
                                     <p:anim calcmode="lin" valueType="num">
                                       <p:cBhvr>
                                         <p:cTn id="22" dur="1000" fill="hold"/>
-                                        <p:tgtEl>
-                                          <p:spTgt spid="13"/>
-                                        </p:tgtEl>
-                                        <p:attrNameLst>
-                                          <p:attrName>ppt_x</p:attrName>
-                                        </p:attrNameLst>
-                                      </p:cBhvr>
-                                      <p:tavLst>
-                                        <p:tav tm="0">
-                                          <p:val>
-                                            <p:strVal val="#ppt_x"/>
-                                          </p:val>
-                                        </p:tav>
-                                        <p:tav tm="100000">
-                                          <p:val>
-                                            <p:strVal val="#ppt_x"/>
-                                          </p:val>
-                                        </p:tav>
-                                      </p:tavLst>
-                                    </p:anim>
-                                    <p:anim calcmode="lin" valueType="num">
-                                      <p:cBhvr>
-                                        <p:cTn id="23" dur="1000" fill="hold"/>
-                                        <p:tgtEl>
-                                          <p:spTgt spid="13"/>
-                                        </p:tgtEl>
-                                        <p:attrNameLst>
-                                          <p:attrName>ppt_y</p:attrName>
-                                        </p:attrNameLst>
-                                      </p:cBhvr>
-                                      <p:tavLst>
-                                        <p:tav tm="0">
-                                          <p:val>
-                                            <p:strVal val="#ppt_y+.1"/>
-                                          </p:val>
-                                        </p:tav>
-                                        <p:tav tm="100000">
-                                          <p:val>
-                                            <p:strVal val="#ppt_y"/>
-                                          </p:val>
-                                        </p:tav>
-                                      </p:tavLst>
-                                    </p:anim>
-                                  </p:childTnLst>
-                                </p:cTn>
-                              </p:par>
-                            </p:childTnLst>
-                          </p:cTn>
-                        </p:par>
-                      </p:childTnLst>
-                    </p:cTn>
-                  </p:par>
-                  <p:par>
-                    <p:cTn id="24" fill="hold">
-                      <p:stCondLst>
-                        <p:cond delay="indefinite"/>
-                      </p:stCondLst>
-                      <p:childTnLst>
-                        <p:par>
-                          <p:cTn id="25" fill="hold">
-                            <p:stCondLst>
-                              <p:cond delay="0"/>
-                            </p:stCondLst>
-                            <p:childTnLst>
-                              <p:par>
-                                <p:cTn id="26" presetID="42" presetClass="entr" presetSubtype="0" fill="hold" nodeType="clickEffect">
-                                  <p:stCondLst>
-                                    <p:cond delay="0"/>
-                                  </p:stCondLst>
-                                  <p:childTnLst>
-                                    <p:set>
-                                      <p:cBhvr>
-                                        <p:cTn id="27" dur="1" fill="hold">
-                                          <p:stCondLst>
-                                            <p:cond delay="0"/>
-                                          </p:stCondLst>
-                                        </p:cTn>
-                                        <p:tgtEl>
-                                          <p:spTgt spid="34"/>
-                                        </p:tgtEl>
-                                        <p:attrNameLst>
-                                          <p:attrName>style.visibility</p:attrName>
-                                        </p:attrNameLst>
-                                      </p:cBhvr>
-                                      <p:to>
-                                        <p:strVal val="visible"/>
-                                      </p:to>
-                                    </p:set>
-                                    <p:animEffect transition="in" filter="fade">
-                                      <p:cBhvr>
-                                        <p:cTn id="28" dur="1000"/>
-                                        <p:tgtEl>
-                                          <p:spTgt spid="34"/>
-                                        </p:tgtEl>
-                                      </p:cBhvr>
-                                    </p:animEffect>
-                                    <p:anim calcmode="lin" valueType="num">
-                                      <p:cBhvr>
-                                        <p:cTn id="29" dur="1000" fill="hold"/>
                                         <p:tgtEl>
                                           <p:spTgt spid="34"/>
                                         </p:tgtEl>
@@ -32587,7 +31841,7 @@
                                     </p:anim>
                                     <p:anim calcmode="lin" valueType="num">
                                       <p:cBhvr>
-                                        <p:cTn id="30" dur="1000" fill="hold"/>
+                                        <p:cTn id="23" dur="1000" fill="hold"/>
                                         <p:tgtEl>
                                           <p:spTgt spid="34"/>
                                         </p:tgtEl>
